--- a/05_实现原型/downloads/ppt/学习资料_1786144615.pptx
+++ b/05_实现原型/downloads/ppt/学习资料_1786144615.pptx
@@ -3239,7 +3239,7 @@
               </a:defRPr>
             </a:pPr>
             <a:r>
-              <a:t>资料来源：什么（汉语词语）_百度百科、什么值得买 | 我们的兴趣消费指南、「什么」读作 sh&amp;#233;nme 还是 shěnme？ - 知乎、微PE工具箱 - 超好用的装机维护工具、聚乙烯_百度百科、微PE工具箱 - 下载、PEG指标_百度百科</a:t>
+              <a:t>资料来源：信息茧房_百度百科、什么是信息茧房丨深度笔记 - 知乎、算法推荐带来“信息茧房” 视野受限、认知固化 如何“破茧 ...、打破（汉语词汇）_百度百科、打破和突破的区别、打破的意思_打破的解释-汉语国学</a:t>
             </a:r>
           </a:p>
         </p:txBody>
@@ -3310,7 +3310,7 @@
               </a:defRPr>
             </a:pPr>
             <a:r>
-              <a:t>什么是“什么”？——一个汉语疑问词的奇妙之旅</a:t>
+              <a:t>什么是信息茧房？</a:t>
             </a:r>
           </a:p>
         </p:txBody>
@@ -3349,7 +3349,7 @@
               </a:defRPr>
             </a:pPr>
             <a:r>
-              <a:t>• 引入：当我们问“这是什么”时，“什么”到底在句子中扮演什么角色？</a:t>
+              <a:t>• 信息茧房指人们因偏执于某类信息，将了解面局限于像蚕茧一样的“茧房”中</a:t>
             </a:r>
           </a:p>
           <a:p>
@@ -3365,7 +3365,7 @@
               </a:defRPr>
             </a:pPr>
             <a:r>
-              <a:t>• 核心问题：一个看似简单的词，为何能衍生出如此多样的用法？</a:t>
+              <a:t>• 在算法推荐时代，个性化推送让用户长期接触同质化内容，视野逐渐受限</a:t>
             </a:r>
           </a:p>
           <a:p>
@@ -3381,7 +3381,7 @@
               </a:defRPr>
             </a:pPr>
             <a:r>
-              <a:t>• 本课目标：从语法功能、发音演变到实际应用，全面解析“什么”</a:t>
+              <a:t>• 它是一种隐形现象，影响我们对世界的认知，而我们往往对此毫无察觉</a:t>
             </a:r>
           </a:p>
         </p:txBody>
@@ -3488,7 +3488,7 @@
               </a:defRPr>
             </a:pPr>
             <a:r>
-              <a:t>“什么”的四种语法身份</a:t>
+              <a:t>信息茧房的形成机制</a:t>
             </a:r>
           </a:p>
         </p:txBody>
@@ -3527,7 +3527,7 @@
               </a:defRPr>
             </a:pPr>
             <a:r>
-              <a:t>• 疑问代词：用于提问，如“这是什么？”——最基础的用法</a:t>
+              <a:t>• 个性化推荐算法根据用户偏好持续推送相似内容，形成“过滤气泡”</a:t>
             </a:r>
           </a:p>
           <a:p>
@@ -3543,7 +3543,7 @@
               </a:defRPr>
             </a:pPr>
             <a:r>
-              <a:t>• 指示代词：指代不确定的事物，如“说些什么好呢”</a:t>
+              <a:t>• 用户自身的信息筛选习惯和认知偏好，强化了对特定领域的依赖</a:t>
             </a:r>
           </a:p>
           <a:p>
@@ -3559,23 +3559,7 @@
               </a:defRPr>
             </a:pPr>
             <a:r>
-              <a:t>• 疑问形容词：修饰名词，如“住在什么地方？”</a:t>
-            </a:r>
-          </a:p>
-          <a:p>
-            <a:pPr>
-              <a:spcAft>
-                <a:spcPts val="800"/>
-              </a:spcAft>
-              <a:defRPr sz="1600">
-                <a:solidFill>
-                  <a:srgbClr val="222222"/>
-                </a:solidFill>
-                <a:latin typeface="Microsoft YaHei"/>
-              </a:defRPr>
-            </a:pPr>
-            <a:r>
-              <a:t>• 虚指用法：表示不确定或无需明说的人或事</a:t>
+              <a:t>• 算法与用户偏好的双向互动，让信息接触面不断收窄，认知逐渐固化</a:t>
             </a:r>
           </a:p>
         </p:txBody>
@@ -3682,7 +3666,7 @@
               </a:defRPr>
             </a:pPr>
             <a:r>
-              <a:t>发音之谜：shénme 还是 shěnme？</a:t>
+              <a:t>信息茧房的负面影响</a:t>
             </a:r>
           </a:p>
         </p:txBody>
@@ -3721,7 +3705,7 @@
               </a:defRPr>
             </a:pPr>
             <a:r>
-              <a:t>• 历史演变：早期读作 shí-ma，后经语音融合演变为 shí-m-ma</a:t>
+              <a:t>• 视野受限：长期只接触同质化信息，对多元观点和领域形成无知</a:t>
             </a:r>
           </a:p>
           <a:p>
@@ -3737,7 +3721,7 @@
               </a:defRPr>
             </a:pPr>
             <a:r>
-              <a:t>• 现代标准：普通话规范读音为 shénme，但口语中常出现弱化</a:t>
+              <a:t>• 认知固化：思维模式被锁定，难以接受不同意见，判断力下降</a:t>
             </a:r>
           </a:p>
           <a:p>
@@ -3753,7 +3737,7 @@
               </a:defRPr>
             </a:pPr>
             <a:r>
-              <a:t>• 语言规律：声母“m”与韵母的粘连现象解释了发音变迁</a:t>
+              <a:t>• 群体极化：同类信息反复强化，可能加剧偏见与对立，影响理性决策</a:t>
             </a:r>
           </a:p>
         </p:txBody>
@@ -3860,7 +3844,7 @@
               </a:defRPr>
             </a:pPr>
             <a:r>
-              <a:t>从“什么”到“PE”——一词多义的跨界之旅</a:t>
+              <a:t>如何“破茧”而出</a:t>
             </a:r>
           </a:p>
         </p:txBody>
@@ -3899,7 +3883,7 @@
               </a:defRPr>
             </a:pPr>
             <a:r>
-              <a:t>• “什么”的拼音缩写“SM”在科技领域另有所指</a:t>
+              <a:t>• “打破”一词源于北魏《齐民要术》，内涵包括突破界限、结束停滞状态</a:t>
             </a:r>
           </a:p>
           <a:p>
@@ -3915,7 +3899,7 @@
               </a:defRPr>
             </a:pPr>
             <a:r>
-              <a:t>• PE 的多重含义：聚乙烯（化工）、市盈增长比率（金融）、微PE工具箱（计算机）</a:t>
+              <a:t>• 主动拓宽信息渠道，接触不同立场和领域的观点，打破认知边界</a:t>
             </a:r>
           </a:p>
           <a:p>
@@ -3931,7 +3915,7 @@
               </a:defRPr>
             </a:pPr>
             <a:r>
-              <a:t>• 启示：汉语词汇在不同语境中承载截然不同的知识体系</a:t>
+              <a:t>• 善用算法而非被算法支配，定期清理推荐偏好，有意识地“反推荐”浏览</a:t>
             </a:r>
           </a:p>
         </p:txBody>
@@ -4038,7 +4022,7 @@
               </a:defRPr>
             </a:pPr>
             <a:r>
-              <a:t>总结：小词大用，语言即思维</a:t>
+              <a:t>总结：从“茧房”到开放认知</a:t>
             </a:r>
           </a:p>
         </p:txBody>
@@ -4077,7 +4061,7 @@
               </a:defRPr>
             </a:pPr>
             <a:r>
-              <a:t>• “什么”的丰富用法体现了汉语的灵活性与表达力</a:t>
+              <a:t>• 信息茧房是算法时代的重要挑战，影响个人成长与社会共识</a:t>
             </a:r>
           </a:p>
           <a:p>
@@ -4093,7 +4077,7 @@
               </a:defRPr>
             </a:pPr>
             <a:r>
-              <a:t>• 一词多义现象提示我们：理解语境是掌握语言的关键</a:t>
+              <a:t>• “打破”不仅是物理动作，更是突破限制、结束僵局的思维转变</a:t>
             </a:r>
           </a:p>
           <a:p>
@@ -4109,7 +4093,7 @@
               </a:defRPr>
             </a:pPr>
             <a:r>
-              <a:t>• 思考题：你还知道哪些像“什么”一样身兼数职的汉语词汇？</a:t>
+              <a:t>• 保持信息开放与批判性思考，是每个人在数字时代的必修课</a:t>
             </a:r>
           </a:p>
         </p:txBody>

--- a/05_实现原型/downloads/ppt/学习资料_1786144615.pptx
+++ b/05_实现原型/downloads/ppt/学习资料_1786144615.pptx
@@ -7,10 +7,6 @@
   <p:sldIdLst>
     <p:sldId id="256" r:id="rId7"/>
     <p:sldId id="257" r:id="rId8"/>
-    <p:sldId id="258" r:id="rId9"/>
-    <p:sldId id="259" r:id="rId10"/>
-    <p:sldId id="260" r:id="rId11"/>
-    <p:sldId id="261" r:id="rId12"/>
   </p:sldIdLst>
   <p:sldSz cx="12188952" cy="6858000" type="screen4x3"/>
   <p:notesSz cx="6858000" cy="9144000"/>
@@ -3208,42 +3204,6 @@
           </a:p>
         </p:txBody>
       </p:sp>
-      <p:sp>
-        <p:nvSpPr>
-          <p:cNvPr id="5" name="TextBox 4"/>
-          <p:cNvSpPr txBox="1"/>
-          <p:nvPr/>
-        </p:nvSpPr>
-        <p:spPr>
-          <a:xfrm>
-            <a:off x="1371600" y="5120640"/>
-            <a:ext cx="9418320" cy="1097280"/>
-          </a:xfrm>
-          <a:prstGeom prst="rect">
-            <a:avLst/>
-          </a:prstGeom>
-          <a:noFill/>
-        </p:spPr>
-        <p:txBody>
-          <a:bodyPr wrap="square">
-            <a:spAutoFit/>
-          </a:bodyPr>
-          <a:lstStyle/>
-          <a:p>
-            <a:pPr algn="ctr">
-              <a:defRPr sz="1200" b="0">
-                <a:solidFill>
-                  <a:srgbClr val="DEEBF7"/>
-                </a:solidFill>
-                <a:latin typeface="Microsoft YaHei"/>
-              </a:defRPr>
-            </a:pPr>
-            <a:r>
-              <a:t>资料来源：信息茧房_百度百科、什么是信息茧房丨深度笔记 - 知乎、算法推荐带来“信息茧房” 视野受限、认知固化 如何“破茧 ...、打破（汉语词汇）_百度百科、打破和突破的区别、打破的意思_打破的解释-汉语国学</a:t>
-            </a:r>
-          </a:p>
-        </p:txBody>
-      </p:sp>
     </p:spTree>
   </p:cSld>
   <p:clrMapOvr>
@@ -3310,7 +3270,7 @@
               </a:defRPr>
             </a:pPr>
             <a:r>
-              <a:t>什么是信息茧房？</a:t>
+              <a:t>演示文稿</a:t>
             </a:r>
           </a:p>
         </p:txBody>
@@ -3349,39 +3309,7 @@
               </a:defRPr>
             </a:pPr>
             <a:r>
-              <a:t>• 信息茧房指人们因偏执于某类信息，将了解面局限于像蚕茧一样的“茧房”中</a:t>
-            </a:r>
-          </a:p>
-          <a:p>
-            <a:pPr>
-              <a:spcAft>
-                <a:spcPts val="800"/>
-              </a:spcAft>
-              <a:defRPr sz="1600">
-                <a:solidFill>
-                  <a:srgbClr val="222222"/>
-                </a:solidFill>
-                <a:latin typeface="Microsoft YaHei"/>
-              </a:defRPr>
-            </a:pPr>
-            <a:r>
-              <a:t>• 在算法推荐时代，个性化推送让用户长期接触同质化内容，视野逐渐受限</a:t>
-            </a:r>
-          </a:p>
-          <a:p>
-            <a:pPr>
-              <a:spcAft>
-                <a:spcPts val="800"/>
-              </a:spcAft>
-              <a:defRPr sz="1600">
-                <a:solidFill>
-                  <a:srgbClr val="222222"/>
-                </a:solidFill>
-                <a:latin typeface="Microsoft YaHei"/>
-              </a:defRPr>
-            </a:pPr>
-            <a:r>
-              <a:t>• 它是一种隐形现象，影响我们对世界的认知，而我们往往对此毫无察觉</a:t>
+              <a:t>• （空大纲，请补充内容）</a:t>
             </a:r>
           </a:p>
         </p:txBody>
@@ -3418,718 +3346,6 @@
             </a:pPr>
             <a:r>
               <a:t>2</a:t>
-            </a:r>
-          </a:p>
-        </p:txBody>
-      </p:sp>
-    </p:spTree>
-  </p:cSld>
-  <p:clrMapOvr>
-    <a:masterClrMapping/>
-  </p:clrMapOvr>
-</p:sld>
-</file>
-
-<file path=ppt/slides/slide3.xml><?xml version="1.0" encoding="utf-8"?>
-<p:sld xmlns:a="http://schemas.openxmlformats.org/drawingml/2006/main" xmlns:p="http://schemas.openxmlformats.org/presentationml/2006/main" xmlns:r="http://schemas.openxmlformats.org/officeDocument/2006/relationships">
-  <p:cSld>
-    <p:spTree>
-      <p:nvGrpSpPr>
-        <p:cNvPr id="1" name=""/>
-        <p:cNvGrpSpPr/>
-        <p:nvPr/>
-      </p:nvGrpSpPr>
-      <p:grpSpPr/>
-      <p:sp>
-        <p:nvSpPr>
-          <p:cNvPr id="2" name="Rectangle 1"/>
-          <p:cNvSpPr/>
-          <p:nvPr/>
-        </p:nvSpPr>
-        <p:spPr>
-          <a:xfrm>
-            <a:off x="0" y="0"/>
-            <a:ext cx="12188952" cy="914400"/>
-          </a:xfrm>
-          <a:prstGeom prst="rect">
-            <a:avLst/>
-          </a:prstGeom>
-          <a:solidFill>
-            <a:srgbClr val="1F4E79"/>
-          </a:solidFill>
-          <a:ln>
-            <a:noFill/>
-          </a:ln>
-        </p:spPr>
-        <p:style>
-          <a:lnRef idx="1">
-            <a:schemeClr val="accent1"/>
-          </a:lnRef>
-          <a:fillRef idx="3">
-            <a:schemeClr val="accent1"/>
-          </a:fillRef>
-          <a:effectRef idx="2">
-            <a:schemeClr val="accent1"/>
-          </a:effectRef>
-          <a:fontRef idx="minor">
-            <a:schemeClr val="lt1"/>
-          </a:fontRef>
-        </p:style>
-        <p:txBody>
-          <a:bodyPr rtlCol="0" anchor="ctr" wrap="square"/>
-          <a:lstStyle/>
-          <a:p>
-            <a:pPr algn="l">
-              <a:defRPr sz="2600" b="1">
-                <a:solidFill>
-                  <a:srgbClr val="FFFFFF"/>
-                </a:solidFill>
-                <a:latin typeface="Microsoft YaHei"/>
-              </a:defRPr>
-            </a:pPr>
-            <a:r>
-              <a:t>信息茧房的形成机制</a:t>
-            </a:r>
-          </a:p>
-        </p:txBody>
-      </p:sp>
-      <p:sp>
-        <p:nvSpPr>
-          <p:cNvPr id="3" name="TextBox 2"/>
-          <p:cNvSpPr txBox="1"/>
-          <p:nvPr/>
-        </p:nvSpPr>
-        <p:spPr>
-          <a:xfrm>
-            <a:off x="548640" y="1280160"/>
-            <a:ext cx="11064240" cy="4754880"/>
-          </a:xfrm>
-          <a:prstGeom prst="rect">
-            <a:avLst/>
-          </a:prstGeom>
-          <a:noFill/>
-        </p:spPr>
-        <p:txBody>
-          <a:bodyPr wrap="square">
-            <a:spAutoFit/>
-          </a:bodyPr>
-          <a:lstStyle/>
-          <a:p>
-            <a:pPr>
-              <a:spcAft>
-                <a:spcPts val="800"/>
-              </a:spcAft>
-              <a:defRPr sz="1600">
-                <a:solidFill>
-                  <a:srgbClr val="222222"/>
-                </a:solidFill>
-                <a:latin typeface="Microsoft YaHei"/>
-              </a:defRPr>
-            </a:pPr>
-            <a:r>
-              <a:t>• 个性化推荐算法根据用户偏好持续推送相似内容，形成“过滤气泡”</a:t>
-            </a:r>
-          </a:p>
-          <a:p>
-            <a:pPr>
-              <a:spcAft>
-                <a:spcPts val="800"/>
-              </a:spcAft>
-              <a:defRPr sz="1600">
-                <a:solidFill>
-                  <a:srgbClr val="222222"/>
-                </a:solidFill>
-                <a:latin typeface="Microsoft YaHei"/>
-              </a:defRPr>
-            </a:pPr>
-            <a:r>
-              <a:t>• 用户自身的信息筛选习惯和认知偏好，强化了对特定领域的依赖</a:t>
-            </a:r>
-          </a:p>
-          <a:p>
-            <a:pPr>
-              <a:spcAft>
-                <a:spcPts val="800"/>
-              </a:spcAft>
-              <a:defRPr sz="1600">
-                <a:solidFill>
-                  <a:srgbClr val="222222"/>
-                </a:solidFill>
-                <a:latin typeface="Microsoft YaHei"/>
-              </a:defRPr>
-            </a:pPr>
-            <a:r>
-              <a:t>• 算法与用户偏好的双向互动，让信息接触面不断收窄，认知逐渐固化</a:t>
-            </a:r>
-          </a:p>
-        </p:txBody>
-      </p:sp>
-      <p:sp>
-        <p:nvSpPr>
-          <p:cNvPr id="4" name="TextBox 3"/>
-          <p:cNvSpPr txBox="1"/>
-          <p:nvPr/>
-        </p:nvSpPr>
-        <p:spPr>
-          <a:xfrm>
-            <a:off x="11155680" y="6400800"/>
-            <a:ext cx="914400" cy="365760"/>
-          </a:xfrm>
-          <a:prstGeom prst="rect">
-            <a:avLst/>
-          </a:prstGeom>
-          <a:noFill/>
-        </p:spPr>
-        <p:txBody>
-          <a:bodyPr wrap="square">
-            <a:spAutoFit/>
-          </a:bodyPr>
-          <a:lstStyle/>
-          <a:p>
-            <a:pPr algn="r">
-              <a:defRPr sz="1000" b="0">
-                <a:solidFill>
-                  <a:srgbClr val="666666"/>
-                </a:solidFill>
-                <a:latin typeface="Microsoft YaHei"/>
-              </a:defRPr>
-            </a:pPr>
-            <a:r>
-              <a:t>3</a:t>
-            </a:r>
-          </a:p>
-        </p:txBody>
-      </p:sp>
-    </p:spTree>
-  </p:cSld>
-  <p:clrMapOvr>
-    <a:masterClrMapping/>
-  </p:clrMapOvr>
-</p:sld>
-</file>
-
-<file path=ppt/slides/slide4.xml><?xml version="1.0" encoding="utf-8"?>
-<p:sld xmlns:a="http://schemas.openxmlformats.org/drawingml/2006/main" xmlns:p="http://schemas.openxmlformats.org/presentationml/2006/main" xmlns:r="http://schemas.openxmlformats.org/officeDocument/2006/relationships">
-  <p:cSld>
-    <p:spTree>
-      <p:nvGrpSpPr>
-        <p:cNvPr id="1" name=""/>
-        <p:cNvGrpSpPr/>
-        <p:nvPr/>
-      </p:nvGrpSpPr>
-      <p:grpSpPr/>
-      <p:sp>
-        <p:nvSpPr>
-          <p:cNvPr id="2" name="Rectangle 1"/>
-          <p:cNvSpPr/>
-          <p:nvPr/>
-        </p:nvSpPr>
-        <p:spPr>
-          <a:xfrm>
-            <a:off x="0" y="0"/>
-            <a:ext cx="12188952" cy="914400"/>
-          </a:xfrm>
-          <a:prstGeom prst="rect">
-            <a:avLst/>
-          </a:prstGeom>
-          <a:solidFill>
-            <a:srgbClr val="1F4E79"/>
-          </a:solidFill>
-          <a:ln>
-            <a:noFill/>
-          </a:ln>
-        </p:spPr>
-        <p:style>
-          <a:lnRef idx="1">
-            <a:schemeClr val="accent1"/>
-          </a:lnRef>
-          <a:fillRef idx="3">
-            <a:schemeClr val="accent1"/>
-          </a:fillRef>
-          <a:effectRef idx="2">
-            <a:schemeClr val="accent1"/>
-          </a:effectRef>
-          <a:fontRef idx="minor">
-            <a:schemeClr val="lt1"/>
-          </a:fontRef>
-        </p:style>
-        <p:txBody>
-          <a:bodyPr rtlCol="0" anchor="ctr" wrap="square"/>
-          <a:lstStyle/>
-          <a:p>
-            <a:pPr algn="l">
-              <a:defRPr sz="2600" b="1">
-                <a:solidFill>
-                  <a:srgbClr val="FFFFFF"/>
-                </a:solidFill>
-                <a:latin typeface="Microsoft YaHei"/>
-              </a:defRPr>
-            </a:pPr>
-            <a:r>
-              <a:t>信息茧房的负面影响</a:t>
-            </a:r>
-          </a:p>
-        </p:txBody>
-      </p:sp>
-      <p:sp>
-        <p:nvSpPr>
-          <p:cNvPr id="3" name="TextBox 2"/>
-          <p:cNvSpPr txBox="1"/>
-          <p:nvPr/>
-        </p:nvSpPr>
-        <p:spPr>
-          <a:xfrm>
-            <a:off x="548640" y="1280160"/>
-            <a:ext cx="11064240" cy="4754880"/>
-          </a:xfrm>
-          <a:prstGeom prst="rect">
-            <a:avLst/>
-          </a:prstGeom>
-          <a:noFill/>
-        </p:spPr>
-        <p:txBody>
-          <a:bodyPr wrap="square">
-            <a:spAutoFit/>
-          </a:bodyPr>
-          <a:lstStyle/>
-          <a:p>
-            <a:pPr>
-              <a:spcAft>
-                <a:spcPts val="800"/>
-              </a:spcAft>
-              <a:defRPr sz="1600">
-                <a:solidFill>
-                  <a:srgbClr val="222222"/>
-                </a:solidFill>
-                <a:latin typeface="Microsoft YaHei"/>
-              </a:defRPr>
-            </a:pPr>
-            <a:r>
-              <a:t>• 视野受限：长期只接触同质化信息，对多元观点和领域形成无知</a:t>
-            </a:r>
-          </a:p>
-          <a:p>
-            <a:pPr>
-              <a:spcAft>
-                <a:spcPts val="800"/>
-              </a:spcAft>
-              <a:defRPr sz="1600">
-                <a:solidFill>
-                  <a:srgbClr val="222222"/>
-                </a:solidFill>
-                <a:latin typeface="Microsoft YaHei"/>
-              </a:defRPr>
-            </a:pPr>
-            <a:r>
-              <a:t>• 认知固化：思维模式被锁定，难以接受不同意见，判断力下降</a:t>
-            </a:r>
-          </a:p>
-          <a:p>
-            <a:pPr>
-              <a:spcAft>
-                <a:spcPts val="800"/>
-              </a:spcAft>
-              <a:defRPr sz="1600">
-                <a:solidFill>
-                  <a:srgbClr val="222222"/>
-                </a:solidFill>
-                <a:latin typeface="Microsoft YaHei"/>
-              </a:defRPr>
-            </a:pPr>
-            <a:r>
-              <a:t>• 群体极化：同类信息反复强化，可能加剧偏见与对立，影响理性决策</a:t>
-            </a:r>
-          </a:p>
-        </p:txBody>
-      </p:sp>
-      <p:sp>
-        <p:nvSpPr>
-          <p:cNvPr id="4" name="TextBox 3"/>
-          <p:cNvSpPr txBox="1"/>
-          <p:nvPr/>
-        </p:nvSpPr>
-        <p:spPr>
-          <a:xfrm>
-            <a:off x="11155680" y="6400800"/>
-            <a:ext cx="914400" cy="365760"/>
-          </a:xfrm>
-          <a:prstGeom prst="rect">
-            <a:avLst/>
-          </a:prstGeom>
-          <a:noFill/>
-        </p:spPr>
-        <p:txBody>
-          <a:bodyPr wrap="square">
-            <a:spAutoFit/>
-          </a:bodyPr>
-          <a:lstStyle/>
-          <a:p>
-            <a:pPr algn="r">
-              <a:defRPr sz="1000" b="0">
-                <a:solidFill>
-                  <a:srgbClr val="666666"/>
-                </a:solidFill>
-                <a:latin typeface="Microsoft YaHei"/>
-              </a:defRPr>
-            </a:pPr>
-            <a:r>
-              <a:t>4</a:t>
-            </a:r>
-          </a:p>
-        </p:txBody>
-      </p:sp>
-    </p:spTree>
-  </p:cSld>
-  <p:clrMapOvr>
-    <a:masterClrMapping/>
-  </p:clrMapOvr>
-</p:sld>
-</file>
-
-<file path=ppt/slides/slide5.xml><?xml version="1.0" encoding="utf-8"?>
-<p:sld xmlns:a="http://schemas.openxmlformats.org/drawingml/2006/main" xmlns:p="http://schemas.openxmlformats.org/presentationml/2006/main" xmlns:r="http://schemas.openxmlformats.org/officeDocument/2006/relationships">
-  <p:cSld>
-    <p:spTree>
-      <p:nvGrpSpPr>
-        <p:cNvPr id="1" name=""/>
-        <p:cNvGrpSpPr/>
-        <p:nvPr/>
-      </p:nvGrpSpPr>
-      <p:grpSpPr/>
-      <p:sp>
-        <p:nvSpPr>
-          <p:cNvPr id="2" name="Rectangle 1"/>
-          <p:cNvSpPr/>
-          <p:nvPr/>
-        </p:nvSpPr>
-        <p:spPr>
-          <a:xfrm>
-            <a:off x="0" y="0"/>
-            <a:ext cx="12188952" cy="914400"/>
-          </a:xfrm>
-          <a:prstGeom prst="rect">
-            <a:avLst/>
-          </a:prstGeom>
-          <a:solidFill>
-            <a:srgbClr val="1F4E79"/>
-          </a:solidFill>
-          <a:ln>
-            <a:noFill/>
-          </a:ln>
-        </p:spPr>
-        <p:style>
-          <a:lnRef idx="1">
-            <a:schemeClr val="accent1"/>
-          </a:lnRef>
-          <a:fillRef idx="3">
-            <a:schemeClr val="accent1"/>
-          </a:fillRef>
-          <a:effectRef idx="2">
-            <a:schemeClr val="accent1"/>
-          </a:effectRef>
-          <a:fontRef idx="minor">
-            <a:schemeClr val="lt1"/>
-          </a:fontRef>
-        </p:style>
-        <p:txBody>
-          <a:bodyPr rtlCol="0" anchor="ctr" wrap="square"/>
-          <a:lstStyle/>
-          <a:p>
-            <a:pPr algn="l">
-              <a:defRPr sz="2600" b="1">
-                <a:solidFill>
-                  <a:srgbClr val="FFFFFF"/>
-                </a:solidFill>
-                <a:latin typeface="Microsoft YaHei"/>
-              </a:defRPr>
-            </a:pPr>
-            <a:r>
-              <a:t>如何“破茧”而出</a:t>
-            </a:r>
-          </a:p>
-        </p:txBody>
-      </p:sp>
-      <p:sp>
-        <p:nvSpPr>
-          <p:cNvPr id="3" name="TextBox 2"/>
-          <p:cNvSpPr txBox="1"/>
-          <p:nvPr/>
-        </p:nvSpPr>
-        <p:spPr>
-          <a:xfrm>
-            <a:off x="548640" y="1280160"/>
-            <a:ext cx="11064240" cy="4754880"/>
-          </a:xfrm>
-          <a:prstGeom prst="rect">
-            <a:avLst/>
-          </a:prstGeom>
-          <a:noFill/>
-        </p:spPr>
-        <p:txBody>
-          <a:bodyPr wrap="square">
-            <a:spAutoFit/>
-          </a:bodyPr>
-          <a:lstStyle/>
-          <a:p>
-            <a:pPr>
-              <a:spcAft>
-                <a:spcPts val="800"/>
-              </a:spcAft>
-              <a:defRPr sz="1600">
-                <a:solidFill>
-                  <a:srgbClr val="222222"/>
-                </a:solidFill>
-                <a:latin typeface="Microsoft YaHei"/>
-              </a:defRPr>
-            </a:pPr>
-            <a:r>
-              <a:t>• “打破”一词源于北魏《齐民要术》，内涵包括突破界限、结束停滞状态</a:t>
-            </a:r>
-          </a:p>
-          <a:p>
-            <a:pPr>
-              <a:spcAft>
-                <a:spcPts val="800"/>
-              </a:spcAft>
-              <a:defRPr sz="1600">
-                <a:solidFill>
-                  <a:srgbClr val="222222"/>
-                </a:solidFill>
-                <a:latin typeface="Microsoft YaHei"/>
-              </a:defRPr>
-            </a:pPr>
-            <a:r>
-              <a:t>• 主动拓宽信息渠道，接触不同立场和领域的观点，打破认知边界</a:t>
-            </a:r>
-          </a:p>
-          <a:p>
-            <a:pPr>
-              <a:spcAft>
-                <a:spcPts val="800"/>
-              </a:spcAft>
-              <a:defRPr sz="1600">
-                <a:solidFill>
-                  <a:srgbClr val="222222"/>
-                </a:solidFill>
-                <a:latin typeface="Microsoft YaHei"/>
-              </a:defRPr>
-            </a:pPr>
-            <a:r>
-              <a:t>• 善用算法而非被算法支配，定期清理推荐偏好，有意识地“反推荐”浏览</a:t>
-            </a:r>
-          </a:p>
-        </p:txBody>
-      </p:sp>
-      <p:sp>
-        <p:nvSpPr>
-          <p:cNvPr id="4" name="TextBox 3"/>
-          <p:cNvSpPr txBox="1"/>
-          <p:nvPr/>
-        </p:nvSpPr>
-        <p:spPr>
-          <a:xfrm>
-            <a:off x="11155680" y="6400800"/>
-            <a:ext cx="914400" cy="365760"/>
-          </a:xfrm>
-          <a:prstGeom prst="rect">
-            <a:avLst/>
-          </a:prstGeom>
-          <a:noFill/>
-        </p:spPr>
-        <p:txBody>
-          <a:bodyPr wrap="square">
-            <a:spAutoFit/>
-          </a:bodyPr>
-          <a:lstStyle/>
-          <a:p>
-            <a:pPr algn="r">
-              <a:defRPr sz="1000" b="0">
-                <a:solidFill>
-                  <a:srgbClr val="666666"/>
-                </a:solidFill>
-                <a:latin typeface="Microsoft YaHei"/>
-              </a:defRPr>
-            </a:pPr>
-            <a:r>
-              <a:t>5</a:t>
-            </a:r>
-          </a:p>
-        </p:txBody>
-      </p:sp>
-    </p:spTree>
-  </p:cSld>
-  <p:clrMapOvr>
-    <a:masterClrMapping/>
-  </p:clrMapOvr>
-</p:sld>
-</file>
-
-<file path=ppt/slides/slide6.xml><?xml version="1.0" encoding="utf-8"?>
-<p:sld xmlns:a="http://schemas.openxmlformats.org/drawingml/2006/main" xmlns:p="http://schemas.openxmlformats.org/presentationml/2006/main" xmlns:r="http://schemas.openxmlformats.org/officeDocument/2006/relationships">
-  <p:cSld>
-    <p:spTree>
-      <p:nvGrpSpPr>
-        <p:cNvPr id="1" name=""/>
-        <p:cNvGrpSpPr/>
-        <p:nvPr/>
-      </p:nvGrpSpPr>
-      <p:grpSpPr/>
-      <p:sp>
-        <p:nvSpPr>
-          <p:cNvPr id="2" name="Rectangle 1"/>
-          <p:cNvSpPr/>
-          <p:nvPr/>
-        </p:nvSpPr>
-        <p:spPr>
-          <a:xfrm>
-            <a:off x="0" y="0"/>
-            <a:ext cx="12188952" cy="914400"/>
-          </a:xfrm>
-          <a:prstGeom prst="rect">
-            <a:avLst/>
-          </a:prstGeom>
-          <a:solidFill>
-            <a:srgbClr val="1F4E79"/>
-          </a:solidFill>
-          <a:ln>
-            <a:noFill/>
-          </a:ln>
-        </p:spPr>
-        <p:style>
-          <a:lnRef idx="1">
-            <a:schemeClr val="accent1"/>
-          </a:lnRef>
-          <a:fillRef idx="3">
-            <a:schemeClr val="accent1"/>
-          </a:fillRef>
-          <a:effectRef idx="2">
-            <a:schemeClr val="accent1"/>
-          </a:effectRef>
-          <a:fontRef idx="minor">
-            <a:schemeClr val="lt1"/>
-          </a:fontRef>
-        </p:style>
-        <p:txBody>
-          <a:bodyPr rtlCol="0" anchor="ctr" wrap="square"/>
-          <a:lstStyle/>
-          <a:p>
-            <a:pPr algn="l">
-              <a:defRPr sz="2600" b="1">
-                <a:solidFill>
-                  <a:srgbClr val="FFFFFF"/>
-                </a:solidFill>
-                <a:latin typeface="Microsoft YaHei"/>
-              </a:defRPr>
-            </a:pPr>
-            <a:r>
-              <a:t>总结：从“茧房”到开放认知</a:t>
-            </a:r>
-          </a:p>
-        </p:txBody>
-      </p:sp>
-      <p:sp>
-        <p:nvSpPr>
-          <p:cNvPr id="3" name="TextBox 2"/>
-          <p:cNvSpPr txBox="1"/>
-          <p:nvPr/>
-        </p:nvSpPr>
-        <p:spPr>
-          <a:xfrm>
-            <a:off x="548640" y="1280160"/>
-            <a:ext cx="11064240" cy="4754880"/>
-          </a:xfrm>
-          <a:prstGeom prst="rect">
-            <a:avLst/>
-          </a:prstGeom>
-          <a:noFill/>
-        </p:spPr>
-        <p:txBody>
-          <a:bodyPr wrap="square">
-            <a:spAutoFit/>
-          </a:bodyPr>
-          <a:lstStyle/>
-          <a:p>
-            <a:pPr>
-              <a:spcAft>
-                <a:spcPts val="800"/>
-              </a:spcAft>
-              <a:defRPr sz="1600">
-                <a:solidFill>
-                  <a:srgbClr val="222222"/>
-                </a:solidFill>
-                <a:latin typeface="Microsoft YaHei"/>
-              </a:defRPr>
-            </a:pPr>
-            <a:r>
-              <a:t>• 信息茧房是算法时代的重要挑战，影响个人成长与社会共识</a:t>
-            </a:r>
-          </a:p>
-          <a:p>
-            <a:pPr>
-              <a:spcAft>
-                <a:spcPts val="800"/>
-              </a:spcAft>
-              <a:defRPr sz="1600">
-                <a:solidFill>
-                  <a:srgbClr val="222222"/>
-                </a:solidFill>
-                <a:latin typeface="Microsoft YaHei"/>
-              </a:defRPr>
-            </a:pPr>
-            <a:r>
-              <a:t>• “打破”不仅是物理动作，更是突破限制、结束僵局的思维转变</a:t>
-            </a:r>
-          </a:p>
-          <a:p>
-            <a:pPr>
-              <a:spcAft>
-                <a:spcPts val="800"/>
-              </a:spcAft>
-              <a:defRPr sz="1600">
-                <a:solidFill>
-                  <a:srgbClr val="222222"/>
-                </a:solidFill>
-                <a:latin typeface="Microsoft YaHei"/>
-              </a:defRPr>
-            </a:pPr>
-            <a:r>
-              <a:t>• 保持信息开放与批判性思考，是每个人在数字时代的必修课</a:t>
-            </a:r>
-          </a:p>
-        </p:txBody>
-      </p:sp>
-      <p:sp>
-        <p:nvSpPr>
-          <p:cNvPr id="4" name="TextBox 3"/>
-          <p:cNvSpPr txBox="1"/>
-          <p:nvPr/>
-        </p:nvSpPr>
-        <p:spPr>
-          <a:xfrm>
-            <a:off x="11155680" y="6400800"/>
-            <a:ext cx="914400" cy="365760"/>
-          </a:xfrm>
-          <a:prstGeom prst="rect">
-            <a:avLst/>
-          </a:prstGeom>
-          <a:noFill/>
-        </p:spPr>
-        <p:txBody>
-          <a:bodyPr wrap="square">
-            <a:spAutoFit/>
-          </a:bodyPr>
-          <a:lstStyle/>
-          <a:p>
-            <a:pPr algn="r">
-              <a:defRPr sz="1000" b="0">
-                <a:solidFill>
-                  <a:srgbClr val="666666"/>
-                </a:solidFill>
-                <a:latin typeface="Microsoft YaHei"/>
-              </a:defRPr>
-            </a:pPr>
-            <a:r>
-              <a:t>6</a:t>
             </a:r>
           </a:p>
         </p:txBody>
